--- a/open_issues.pptx
+++ b/open_issues.pptx
@@ -3963,7 +3963,7 @@
         <p:spPr/>
         <p:txBody>
           <a:bodyPr>
-            <a:normAutofit fontScale="85000" lnSpcReduction="20000"/>
+            <a:normAutofit fontScale="85000" lnSpcReduction="10000"/>
           </a:bodyPr>
           <a:lstStyle/>
           <a:p>
@@ -4019,12 +4019,6 @@
             <a:r>
               <a:rPr lang="en-US" dirty="0"/>
               <a:t>Add module for shortening sample names (plotting sucks with long names)</a:t>
-            </a:r>
-          </a:p>
-          <a:p>
-            <a:r>
-              <a:rPr lang="en-US" dirty="0"/>
-              <a:t>Midpoint support</a:t>
             </a:r>
           </a:p>
           <a:p>
@@ -4417,6 +4411,19 @@
               </a:rPr>
               <a:t>Add into MAP</a:t>
             </a:r>
+          </a:p>
+          <a:p>
+            <a:r>
+              <a:rPr lang="en-US" dirty="0"/>
+              <a:t>Midpoint support</a:t>
+            </a:r>
+          </a:p>
+          <a:p>
+            <a:endParaRPr lang="en-US" dirty="0">
+              <a:highlight>
+                <a:srgbClr val="FFFF00"/>
+              </a:highlight>
+            </a:endParaRPr>
           </a:p>
         </p:txBody>
       </p:sp>
